--- a/examples/demo-layouts/deck.pptx
+++ b/examples/demo-layouts/deck.pptx
@@ -4375,7 +4375,7 @@
                 </a:solidFill>
                 <a:latin typeface="Arial"/>
               </a:rPr>
-              <a:t>The three review gates account for 40% of tokens</a:t>
+              <a:t>The two review gates account for 40% of tokens</a:t>
             </a:r>
           </a:p>
         </p:txBody>
@@ -6664,20 +6664,6 @@
             </a:solidFill>
           </a:ln>
         </p:spPr>
-        <p:style>
-          <a:lnRef idx="2">
-            <a:schemeClr val="accent1"/>
-          </a:lnRef>
-          <a:fillRef idx="0">
-            <a:schemeClr val="accent1"/>
-          </a:fillRef>
-          <a:effectRef idx="1">
-            <a:schemeClr val="accent1"/>
-          </a:effectRef>
-          <a:fontRef idx="minor">
-            <a:schemeClr val="tx1"/>
-          </a:fontRef>
-        </p:style>
       </p:cxnSp>
       <p:sp>
         <p:nvSpPr>
@@ -6764,20 +6750,6 @@
             </a:solidFill>
           </a:ln>
         </p:spPr>
-        <p:style>
-          <a:lnRef idx="2">
-            <a:schemeClr val="accent1"/>
-          </a:lnRef>
-          <a:fillRef idx="0">
-            <a:schemeClr val="accent1"/>
-          </a:fillRef>
-          <a:effectRef idx="1">
-            <a:schemeClr val="accent1"/>
-          </a:effectRef>
-          <a:fontRef idx="minor">
-            <a:schemeClr val="tx1"/>
-          </a:fontRef>
-        </p:style>
       </p:cxnSp>
       <p:sp>
         <p:nvSpPr>
@@ -6864,20 +6836,6 @@
             </a:solidFill>
           </a:ln>
         </p:spPr>
-        <p:style>
-          <a:lnRef idx="2">
-            <a:schemeClr val="accent1"/>
-          </a:lnRef>
-          <a:fillRef idx="0">
-            <a:schemeClr val="accent1"/>
-          </a:fillRef>
-          <a:effectRef idx="1">
-            <a:schemeClr val="accent1"/>
-          </a:effectRef>
-          <a:fontRef idx="minor">
-            <a:schemeClr val="tx1"/>
-          </a:fontRef>
-        </p:style>
       </p:cxnSp>
       <p:sp>
         <p:nvSpPr>
@@ -6964,20 +6922,6 @@
             </a:solidFill>
           </a:ln>
         </p:spPr>
-        <p:style>
-          <a:lnRef idx="2">
-            <a:schemeClr val="accent1"/>
-          </a:lnRef>
-          <a:fillRef idx="0">
-            <a:schemeClr val="accent1"/>
-          </a:fillRef>
-          <a:effectRef idx="1">
-            <a:schemeClr val="accent1"/>
-          </a:effectRef>
-          <a:fontRef idx="minor">
-            <a:schemeClr val="tx1"/>
-          </a:fontRef>
-        </p:style>
       </p:cxnSp>
       <p:sp>
         <p:nvSpPr>
@@ -7064,20 +7008,6 @@
             </a:solidFill>
           </a:ln>
         </p:spPr>
-        <p:style>
-          <a:lnRef idx="2">
-            <a:schemeClr val="accent1"/>
-          </a:lnRef>
-          <a:fillRef idx="0">
-            <a:schemeClr val="accent1"/>
-          </a:fillRef>
-          <a:effectRef idx="1">
-            <a:schemeClr val="accent1"/>
-          </a:effectRef>
-          <a:fontRef idx="minor">
-            <a:schemeClr val="tx1"/>
-          </a:fontRef>
-        </p:style>
       </p:cxnSp>
       <p:sp>
         <p:nvSpPr>
@@ -7164,20 +7094,6 @@
             </a:solidFill>
           </a:ln>
         </p:spPr>
-        <p:style>
-          <a:lnRef idx="2">
-            <a:schemeClr val="accent1"/>
-          </a:lnRef>
-          <a:fillRef idx="0">
-            <a:schemeClr val="accent1"/>
-          </a:fillRef>
-          <a:effectRef idx="1">
-            <a:schemeClr val="accent1"/>
-          </a:effectRef>
-          <a:fontRef idx="minor">
-            <a:schemeClr val="tx1"/>
-          </a:fontRef>
-        </p:style>
       </p:cxnSp>
       <p:sp>
         <p:nvSpPr>
@@ -7353,20 +7269,6 @@
             <a:tailEnd type="triangle"/>
           </a:ln>
         </p:spPr>
-        <p:style>
-          <a:lnRef idx="2">
-            <a:schemeClr val="accent1"/>
-          </a:lnRef>
-          <a:fillRef idx="0">
-            <a:schemeClr val="accent1"/>
-          </a:fillRef>
-          <a:effectRef idx="1">
-            <a:schemeClr val="accent1"/>
-          </a:effectRef>
-          <a:fontRef idx="minor">
-            <a:schemeClr val="tx1"/>
-          </a:fontRef>
-        </p:style>
       </p:cxnSp>
       <p:sp>
         <p:nvSpPr>
@@ -7984,7 +7886,7 @@
                 </a:solidFill>
                 <a:latin typeface="Arial"/>
               </a:rPr>
-              <a:t>Run every deck through framing, fact-check and the three review gates before any slide reaches a client</a:t>
+              <a:t>Run every deck through framing, fact-check and the two review gates before any slide reaches a client</a:t>
             </a:r>
           </a:p>
         </p:txBody>
@@ -8009,20 +7911,6 @@
             </a:solidFill>
           </a:ln>
         </p:spPr>
-        <p:style>
-          <a:lnRef idx="2">
-            <a:schemeClr val="accent1"/>
-          </a:lnRef>
-          <a:fillRef idx="0">
-            <a:schemeClr val="accent1"/>
-          </a:fillRef>
-          <a:effectRef idx="1">
-            <a:schemeClr val="accent1"/>
-          </a:effectRef>
-          <a:fontRef idx="minor">
-            <a:schemeClr val="tx1"/>
-          </a:fontRef>
-        </p:style>
       </p:cxnSp>
       <p:sp>
         <p:nvSpPr>
@@ -8102,20 +7990,6 @@
             </a:solidFill>
           </a:ln>
         </p:spPr>
-        <p:style>
-          <a:lnRef idx="2">
-            <a:schemeClr val="accent1"/>
-          </a:lnRef>
-          <a:fillRef idx="0">
-            <a:schemeClr val="accent1"/>
-          </a:fillRef>
-          <a:effectRef idx="1">
-            <a:schemeClr val="accent1"/>
-          </a:effectRef>
-          <a:fontRef idx="minor">
-            <a:schemeClr val="tx1"/>
-          </a:fontRef>
-        </p:style>
       </p:cxnSp>
       <p:sp>
         <p:nvSpPr>
@@ -8195,20 +8069,6 @@
             </a:solidFill>
           </a:ln>
         </p:spPr>
-        <p:style>
-          <a:lnRef idx="2">
-            <a:schemeClr val="accent1"/>
-          </a:lnRef>
-          <a:fillRef idx="0">
-            <a:schemeClr val="accent1"/>
-          </a:fillRef>
-          <a:effectRef idx="1">
-            <a:schemeClr val="accent1"/>
-          </a:effectRef>
-          <a:fontRef idx="minor">
-            <a:schemeClr val="tx1"/>
-          </a:fontRef>
-        </p:style>
       </p:cxnSp>
       <p:sp>
         <p:nvSpPr>
@@ -10266,20 +10126,6 @@
             </a:solidFill>
           </a:ln>
         </p:spPr>
-        <p:style>
-          <a:lnRef idx="2">
-            <a:schemeClr val="accent1"/>
-          </a:lnRef>
-          <a:fillRef idx="0">
-            <a:schemeClr val="accent1"/>
-          </a:fillRef>
-          <a:effectRef idx="1">
-            <a:schemeClr val="accent1"/>
-          </a:effectRef>
-          <a:fontRef idx="minor">
-            <a:schemeClr val="tx1"/>
-          </a:fontRef>
-        </p:style>
       </p:cxnSp>
       <p:cxnSp>
         <p:nvCxnSpPr>
@@ -10301,20 +10147,6 @@
             </a:solidFill>
           </a:ln>
         </p:spPr>
-        <p:style>
-          <a:lnRef idx="2">
-            <a:schemeClr val="accent1"/>
-          </a:lnRef>
-          <a:fillRef idx="0">
-            <a:schemeClr val="accent1"/>
-          </a:fillRef>
-          <a:effectRef idx="1">
-            <a:schemeClr val="accent1"/>
-          </a:effectRef>
-          <a:fontRef idx="minor">
-            <a:schemeClr val="tx1"/>
-          </a:fontRef>
-        </p:style>
       </p:cxnSp>
       <p:cxnSp>
         <p:nvCxnSpPr>
@@ -10336,20 +10168,6 @@
             </a:solidFill>
           </a:ln>
         </p:spPr>
-        <p:style>
-          <a:lnRef idx="2">
-            <a:schemeClr val="accent1"/>
-          </a:lnRef>
-          <a:fillRef idx="0">
-            <a:schemeClr val="accent1"/>
-          </a:fillRef>
-          <a:effectRef idx="1">
-            <a:schemeClr val="accent1"/>
-          </a:effectRef>
-          <a:fontRef idx="minor">
-            <a:schemeClr val="tx1"/>
-          </a:fontRef>
-        </p:style>
       </p:cxnSp>
       <p:sp>
         <p:nvSpPr>
@@ -10412,20 +10230,6 @@
             </a:solidFill>
           </a:ln>
         </p:spPr>
-        <p:style>
-          <a:lnRef idx="2">
-            <a:schemeClr val="accent1"/>
-          </a:lnRef>
-          <a:fillRef idx="0">
-            <a:schemeClr val="accent1"/>
-          </a:fillRef>
-          <a:effectRef idx="1">
-            <a:schemeClr val="accent1"/>
-          </a:effectRef>
-          <a:fontRef idx="minor">
-            <a:schemeClr val="tx1"/>
-          </a:fontRef>
-        </p:style>
       </p:cxnSp>
       <p:sp>
         <p:nvSpPr>
@@ -10501,20 +10305,6 @@
             </a:solidFill>
           </a:ln>
         </p:spPr>
-        <p:style>
-          <a:lnRef idx="2">
-            <a:schemeClr val="accent1"/>
-          </a:lnRef>
-          <a:fillRef idx="0">
-            <a:schemeClr val="accent1"/>
-          </a:fillRef>
-          <a:effectRef idx="1">
-            <a:schemeClr val="accent1"/>
-          </a:effectRef>
-          <a:fontRef idx="minor">
-            <a:schemeClr val="tx1"/>
-          </a:fontRef>
-        </p:style>
       </p:cxnSp>
       <p:sp>
         <p:nvSpPr>
@@ -10577,20 +10367,6 @@
             </a:solidFill>
           </a:ln>
         </p:spPr>
-        <p:style>
-          <a:lnRef idx="2">
-            <a:schemeClr val="accent1"/>
-          </a:lnRef>
-          <a:fillRef idx="0">
-            <a:schemeClr val="accent1"/>
-          </a:fillRef>
-          <a:effectRef idx="1">
-            <a:schemeClr val="accent1"/>
-          </a:effectRef>
-          <a:fontRef idx="minor">
-            <a:schemeClr val="tx1"/>
-          </a:fontRef>
-        </p:style>
       </p:cxnSp>
       <p:sp>
         <p:nvSpPr>
@@ -10666,20 +10442,6 @@
             </a:solidFill>
           </a:ln>
         </p:spPr>
-        <p:style>
-          <a:lnRef idx="2">
-            <a:schemeClr val="accent1"/>
-          </a:lnRef>
-          <a:fillRef idx="0">
-            <a:schemeClr val="accent1"/>
-          </a:fillRef>
-          <a:effectRef idx="1">
-            <a:schemeClr val="accent1"/>
-          </a:effectRef>
-          <a:fontRef idx="minor">
-            <a:schemeClr val="tx1"/>
-          </a:fontRef>
-        </p:style>
       </p:cxnSp>
       <p:sp>
         <p:nvSpPr>
@@ -10742,20 +10504,6 @@
             </a:solidFill>
           </a:ln>
         </p:spPr>
-        <p:style>
-          <a:lnRef idx="2">
-            <a:schemeClr val="accent1"/>
-          </a:lnRef>
-          <a:fillRef idx="0">
-            <a:schemeClr val="accent1"/>
-          </a:fillRef>
-          <a:effectRef idx="1">
-            <a:schemeClr val="accent1"/>
-          </a:effectRef>
-          <a:fontRef idx="minor">
-            <a:schemeClr val="tx1"/>
-          </a:fontRef>
-        </p:style>
       </p:cxnSp>
       <p:sp>
         <p:nvSpPr>
@@ -11327,20 +11075,6 @@
             </a:solidFill>
           </a:ln>
         </p:spPr>
-        <p:style>
-          <a:lnRef idx="2">
-            <a:schemeClr val="accent1"/>
-          </a:lnRef>
-          <a:fillRef idx="0">
-            <a:schemeClr val="accent1"/>
-          </a:fillRef>
-          <a:effectRef idx="1">
-            <a:schemeClr val="accent1"/>
-          </a:effectRef>
-          <a:fontRef idx="minor">
-            <a:schemeClr val="tx1"/>
-          </a:fontRef>
-        </p:style>
       </p:cxnSp>
       <p:sp>
         <p:nvSpPr>
@@ -11457,20 +11191,6 @@
             </a:solidFill>
           </a:ln>
         </p:spPr>
-        <p:style>
-          <a:lnRef idx="2">
-            <a:schemeClr val="accent1"/>
-          </a:lnRef>
-          <a:fillRef idx="0">
-            <a:schemeClr val="accent1"/>
-          </a:fillRef>
-          <a:effectRef idx="1">
-            <a:schemeClr val="accent1"/>
-          </a:effectRef>
-          <a:fontRef idx="minor">
-            <a:schemeClr val="tx1"/>
-          </a:fontRef>
-        </p:style>
       </p:cxnSp>
       <p:sp>
         <p:nvSpPr>
@@ -11587,20 +11307,6 @@
             </a:solidFill>
           </a:ln>
         </p:spPr>
-        <p:style>
-          <a:lnRef idx="2">
-            <a:schemeClr val="accent1"/>
-          </a:lnRef>
-          <a:fillRef idx="0">
-            <a:schemeClr val="accent1"/>
-          </a:fillRef>
-          <a:effectRef idx="1">
-            <a:schemeClr val="accent1"/>
-          </a:effectRef>
-          <a:fontRef idx="minor">
-            <a:schemeClr val="tx1"/>
-          </a:fontRef>
-        </p:style>
       </p:cxnSp>
       <p:sp>
         <p:nvSpPr>
@@ -11911,20 +11617,6 @@
             <a:tailEnd type="triangle"/>
           </a:ln>
         </p:spPr>
-        <p:style>
-          <a:lnRef idx="2">
-            <a:schemeClr val="accent1"/>
-          </a:lnRef>
-          <a:fillRef idx="0">
-            <a:schemeClr val="accent1"/>
-          </a:fillRef>
-          <a:effectRef idx="1">
-            <a:schemeClr val="accent1"/>
-          </a:effectRef>
-          <a:fontRef idx="minor">
-            <a:schemeClr val="tx1"/>
-          </a:fontRef>
-        </p:style>
       </p:cxnSp>
       <p:cxnSp>
         <p:nvCxnSpPr>
@@ -11947,20 +11639,6 @@
             <a:tailEnd type="triangle"/>
           </a:ln>
         </p:spPr>
-        <p:style>
-          <a:lnRef idx="2">
-            <a:schemeClr val="accent1"/>
-          </a:lnRef>
-          <a:fillRef idx="0">
-            <a:schemeClr val="accent1"/>
-          </a:fillRef>
-          <a:effectRef idx="1">
-            <a:schemeClr val="accent1"/>
-          </a:effectRef>
-          <a:fontRef idx="minor">
-            <a:schemeClr val="tx1"/>
-          </a:fontRef>
-        </p:style>
       </p:cxnSp>
       <p:sp>
         <p:nvSpPr>
